--- a/Меры и основные принципы обеспечения безопасности автоматизированных.pptx
+++ b/Меры и основные принципы обеспечения безопасности автоматизированных.pptx
@@ -6,21 +6,19 @@
   </p:sldMasterIdLst>
   <p:sldIdLst>
     <p:sldId id="256" r:id="rId2"/>
-    <p:sldId id="257" r:id="rId3"/>
-    <p:sldId id="258" r:id="rId4"/>
-    <p:sldId id="259" r:id="rId5"/>
-    <p:sldId id="260" r:id="rId6"/>
-    <p:sldId id="261" r:id="rId7"/>
-    <p:sldId id="262" r:id="rId8"/>
-    <p:sldId id="263" r:id="rId9"/>
-    <p:sldId id="264" r:id="rId10"/>
-    <p:sldId id="265" r:id="rId11"/>
-    <p:sldId id="266" r:id="rId12"/>
-    <p:sldId id="267" r:id="rId13"/>
-    <p:sldId id="268" r:id="rId14"/>
-    <p:sldId id="270" r:id="rId15"/>
-    <p:sldId id="271" r:id="rId16"/>
-    <p:sldId id="272" r:id="rId17"/>
+    <p:sldId id="258" r:id="rId3"/>
+    <p:sldId id="260" r:id="rId4"/>
+    <p:sldId id="261" r:id="rId5"/>
+    <p:sldId id="262" r:id="rId6"/>
+    <p:sldId id="263" r:id="rId7"/>
+    <p:sldId id="264" r:id="rId8"/>
+    <p:sldId id="265" r:id="rId9"/>
+    <p:sldId id="266" r:id="rId10"/>
+    <p:sldId id="267" r:id="rId11"/>
+    <p:sldId id="268" r:id="rId12"/>
+    <p:sldId id="270" r:id="rId13"/>
+    <p:sldId id="271" r:id="rId14"/>
+    <p:sldId id="272" r:id="rId15"/>
   </p:sldIdLst>
   <p:sldSz cx="9144000" cy="6858000" type="screen4x3"/>
   <p:notesSz cx="6858000" cy="9144000"/>
@@ -303,7 +301,7 @@
           <a:p>
             <a:fld id="{AA14DF97-4263-4A12-BFDD-90878C2960A2}" type="datetimeFigureOut">
               <a:rPr lang="ru-RU" smtClean="0"/>
-              <a:t>19.05.2026</a:t>
+              <a:t>02.06.2026</a:t>
             </a:fld>
             <a:endParaRPr lang="ru-RU"/>
           </a:p>
@@ -473,7 +471,7 @@
           <a:p>
             <a:fld id="{AA14DF97-4263-4A12-BFDD-90878C2960A2}" type="datetimeFigureOut">
               <a:rPr lang="ru-RU" smtClean="0"/>
-              <a:t>19.05.2026</a:t>
+              <a:t>02.06.2026</a:t>
             </a:fld>
             <a:endParaRPr lang="ru-RU"/>
           </a:p>
@@ -653,7 +651,7 @@
           <a:p>
             <a:fld id="{AA14DF97-4263-4A12-BFDD-90878C2960A2}" type="datetimeFigureOut">
               <a:rPr lang="ru-RU" smtClean="0"/>
-              <a:t>19.05.2026</a:t>
+              <a:t>02.06.2026</a:t>
             </a:fld>
             <a:endParaRPr lang="ru-RU"/>
           </a:p>
@@ -823,7 +821,7 @@
           <a:p>
             <a:fld id="{AA14DF97-4263-4A12-BFDD-90878C2960A2}" type="datetimeFigureOut">
               <a:rPr lang="ru-RU" smtClean="0"/>
-              <a:t>19.05.2026</a:t>
+              <a:t>02.06.2026</a:t>
             </a:fld>
             <a:endParaRPr lang="ru-RU"/>
           </a:p>
@@ -1069,7 +1067,7 @@
           <a:p>
             <a:fld id="{AA14DF97-4263-4A12-BFDD-90878C2960A2}" type="datetimeFigureOut">
               <a:rPr lang="ru-RU" smtClean="0"/>
-              <a:t>19.05.2026</a:t>
+              <a:t>02.06.2026</a:t>
             </a:fld>
             <a:endParaRPr lang="ru-RU"/>
           </a:p>
@@ -1357,7 +1355,7 @@
           <a:p>
             <a:fld id="{AA14DF97-4263-4A12-BFDD-90878C2960A2}" type="datetimeFigureOut">
               <a:rPr lang="ru-RU" smtClean="0"/>
-              <a:t>19.05.2026</a:t>
+              <a:t>02.06.2026</a:t>
             </a:fld>
             <a:endParaRPr lang="ru-RU"/>
           </a:p>
@@ -1779,7 +1777,7 @@
           <a:p>
             <a:fld id="{AA14DF97-4263-4A12-BFDD-90878C2960A2}" type="datetimeFigureOut">
               <a:rPr lang="ru-RU" smtClean="0"/>
-              <a:t>19.05.2026</a:t>
+              <a:t>02.06.2026</a:t>
             </a:fld>
             <a:endParaRPr lang="ru-RU"/>
           </a:p>
@@ -1897,7 +1895,7 @@
           <a:p>
             <a:fld id="{AA14DF97-4263-4A12-BFDD-90878C2960A2}" type="datetimeFigureOut">
               <a:rPr lang="ru-RU" smtClean="0"/>
-              <a:t>19.05.2026</a:t>
+              <a:t>02.06.2026</a:t>
             </a:fld>
             <a:endParaRPr lang="ru-RU"/>
           </a:p>
@@ -1992,7 +1990,7 @@
           <a:p>
             <a:fld id="{AA14DF97-4263-4A12-BFDD-90878C2960A2}" type="datetimeFigureOut">
               <a:rPr lang="ru-RU" smtClean="0"/>
-              <a:t>19.05.2026</a:t>
+              <a:t>02.06.2026</a:t>
             </a:fld>
             <a:endParaRPr lang="ru-RU"/>
           </a:p>
@@ -2269,7 +2267,7 @@
           <a:p>
             <a:fld id="{AA14DF97-4263-4A12-BFDD-90878C2960A2}" type="datetimeFigureOut">
               <a:rPr lang="ru-RU" smtClean="0"/>
-              <a:t>19.05.2026</a:t>
+              <a:t>02.06.2026</a:t>
             </a:fld>
             <a:endParaRPr lang="ru-RU"/>
           </a:p>
@@ -2522,7 +2520,7 @@
           <a:p>
             <a:fld id="{AA14DF97-4263-4A12-BFDD-90878C2960A2}" type="datetimeFigureOut">
               <a:rPr lang="ru-RU" smtClean="0"/>
-              <a:t>19.05.2026</a:t>
+              <a:t>02.06.2026</a:t>
             </a:fld>
             <a:endParaRPr lang="ru-RU"/>
           </a:p>
@@ -2744,7 +2742,7 @@
           <a:p>
             <a:fld id="{AA14DF97-4263-4A12-BFDD-90878C2960A2}" type="datetimeFigureOut">
               <a:rPr lang="ru-RU" smtClean="0"/>
-              <a:t>19.05.2026</a:t>
+              <a:t>02.06.2026</a:t>
             </a:fld>
             <a:endParaRPr lang="ru-RU"/>
           </a:p>
@@ -3300,248 +3298,6 @@
           <a:lstStyle/>
           <a:p>
             <a:r>
-              <a:rPr lang="ru-RU" sz="2400" b="1" dirty="0" smtClean="0"/>
-              <a:t>Технологические меры</a:t>
-            </a:r>
-            <a:endParaRPr lang="ru-RU" sz="2400" dirty="0"/>
-          </a:p>
-        </p:txBody>
-      </p:sp>
-      <p:sp>
-        <p:nvSpPr>
-          <p:cNvPr id="3" name="Объект 2"/>
-          <p:cNvSpPr>
-            <a:spLocks noGrp="1"/>
-          </p:cNvSpPr>
-          <p:nvPr>
-            <p:ph idx="1"/>
-          </p:nvPr>
-        </p:nvSpPr>
-        <p:spPr>
-          <a:xfrm>
-            <a:off x="971600" y="1600200"/>
-            <a:ext cx="7128792" cy="4525963"/>
-          </a:xfrm>
-        </p:spPr>
-        <p:txBody>
-          <a:bodyPr>
-            <a:normAutofit/>
-          </a:bodyPr>
-          <a:lstStyle/>
-          <a:p>
-            <a:pPr marL="0" indent="541338">
-              <a:buNone/>
-            </a:pPr>
-            <a:r>
-              <a:rPr lang="ru-RU" sz="2000" dirty="0"/>
-              <a:t>П</a:t>
-            </a:r>
-            <a:r>
-              <a:rPr lang="ru-RU" sz="2000" dirty="0" smtClean="0"/>
-              <a:t>редусматривают такие технологические решения и приемы, которые основаны на принципе избыточности (структурной, функциональной, информационной, временной и т. п.) и направлены на уменьшение возможности совершения сотрудниками ошибок и нарушений в рамках мандатного доступа.</a:t>
-            </a:r>
-            <a:r>
-              <a:rPr lang="en-US" sz="2000" dirty="0" smtClean="0"/>
-              <a:t> </a:t>
-            </a:r>
-          </a:p>
-          <a:p>
-            <a:pPr marL="0" indent="541338">
-              <a:buNone/>
-            </a:pPr>
-            <a:r>
-              <a:rPr lang="ru-RU" sz="2000" dirty="0" smtClean="0"/>
-              <a:t>Плюсы: автоматическая работа без участия человека, жёсткий контроль данных на всех этапах обработки.</a:t>
-            </a:r>
-          </a:p>
-          <a:p>
-            <a:pPr marL="0" indent="541338">
-              <a:buNone/>
-            </a:pPr>
-            <a:r>
-              <a:rPr lang="ru-RU" sz="2000" dirty="0" smtClean="0"/>
-              <a:t>Минусы: требуют сложного проектирования на ранних стадиях, снижают гибкость процессов.</a:t>
-            </a:r>
-            <a:endParaRPr lang="en-US" sz="2000" dirty="0" smtClean="0"/>
-          </a:p>
-        </p:txBody>
-      </p:sp>
-    </p:spTree>
-    <p:extLst>
-      <p:ext uri="{BB962C8B-B14F-4D97-AF65-F5344CB8AC3E}">
-        <p14:creationId xmlns:p14="http://schemas.microsoft.com/office/powerpoint/2010/main" val="1570676687"/>
-      </p:ext>
-    </p:extLst>
-  </p:cSld>
-  <p:clrMapOvr>
-    <a:masterClrMapping/>
-  </p:clrMapOvr>
-</p:sld>
-</file>
-
-<file path=ppt/slides/slide11.xml><?xml version="1.0" encoding="utf-8"?>
-<p:sld xmlns:a="http://schemas.openxmlformats.org/drawingml/2006/main" xmlns:r="http://schemas.openxmlformats.org/officeDocument/2006/relationships" xmlns:p="http://schemas.openxmlformats.org/presentationml/2006/main">
-  <p:cSld>
-    <p:spTree>
-      <p:nvGrpSpPr>
-        <p:cNvPr id="1" name=""/>
-        <p:cNvGrpSpPr/>
-        <p:nvPr/>
-      </p:nvGrpSpPr>
-      <p:grpSpPr>
-        <a:xfrm>
-          <a:off x="0" y="0"/>
-          <a:ext cx="0" cy="0"/>
-          <a:chOff x="0" y="0"/>
-          <a:chExt cx="0" cy="0"/>
-        </a:xfrm>
-      </p:grpSpPr>
-      <p:sp>
-        <p:nvSpPr>
-          <p:cNvPr id="2" name="Заголовок 1"/>
-          <p:cNvSpPr>
-            <a:spLocks noGrp="1"/>
-          </p:cNvSpPr>
-          <p:nvPr>
-            <p:ph type="title"/>
-          </p:nvPr>
-        </p:nvSpPr>
-        <p:spPr>
-          <a:xfrm>
-            <a:off x="467544" y="620688"/>
-            <a:ext cx="8229600" cy="1143000"/>
-          </a:xfrm>
-        </p:spPr>
-        <p:txBody>
-          <a:bodyPr>
-            <a:normAutofit/>
-          </a:bodyPr>
-          <a:lstStyle/>
-          <a:p>
-            <a:r>
-              <a:rPr lang="ru-RU" sz="2400" b="1" dirty="0" smtClean="0"/>
-              <a:t>Физические меры</a:t>
-            </a:r>
-            <a:endParaRPr lang="ru-RU" sz="2400" dirty="0"/>
-          </a:p>
-        </p:txBody>
-      </p:sp>
-      <p:sp>
-        <p:nvSpPr>
-          <p:cNvPr id="3" name="Объект 2"/>
-          <p:cNvSpPr>
-            <a:spLocks noGrp="1"/>
-          </p:cNvSpPr>
-          <p:nvPr>
-            <p:ph idx="1"/>
-          </p:nvPr>
-        </p:nvSpPr>
-        <p:spPr>
-          <a:xfrm>
-            <a:off x="971600" y="1600200"/>
-            <a:ext cx="7128792" cy="4525963"/>
-          </a:xfrm>
-        </p:spPr>
-        <p:txBody>
-          <a:bodyPr>
-            <a:normAutofit/>
-          </a:bodyPr>
-          <a:lstStyle/>
-          <a:p>
-            <a:pPr marL="0" indent="541338">
-              <a:buNone/>
-            </a:pPr>
-            <a:r>
-              <a:rPr lang="ru-RU" sz="2000" dirty="0" smtClean="0"/>
-              <a:t>Под ними понимают физические препятствия на возможных путях проникновения потенциальных нарушителей к компонентам системы. </a:t>
-            </a:r>
-          </a:p>
-          <a:p>
-            <a:pPr marL="0" indent="541338">
-              <a:buNone/>
-            </a:pPr>
-            <a:r>
-              <a:rPr lang="ru-RU" sz="2000" dirty="0"/>
-              <a:t>Плюсы: барьер против хищения оборудования, защита от аварий (пожаров, затоплений), психологическое отпугивание нарушителей.</a:t>
-            </a:r>
-          </a:p>
-          <a:p>
-            <a:pPr marL="0" indent="541338">
-              <a:buNone/>
-            </a:pPr>
-            <a:r>
-              <a:rPr lang="ru-RU" sz="2000" dirty="0"/>
-              <a:t>Минусы: бесполезны против удалённых атак, требуют постоянных затрат на охрану и оборудование.</a:t>
-            </a:r>
-          </a:p>
-          <a:p>
-            <a:pPr marL="0" indent="541338">
-              <a:buNone/>
-            </a:pPr>
-            <a:endParaRPr lang="ru-RU" sz="2000" dirty="0" smtClean="0"/>
-          </a:p>
-        </p:txBody>
-      </p:sp>
-    </p:spTree>
-    <p:extLst>
-      <p:ext uri="{BB962C8B-B14F-4D97-AF65-F5344CB8AC3E}">
-        <p14:creationId xmlns:p14="http://schemas.microsoft.com/office/powerpoint/2010/main" val="1893546727"/>
-      </p:ext>
-    </p:extLst>
-  </p:cSld>
-  <p:clrMapOvr>
-    <a:masterClrMapping/>
-  </p:clrMapOvr>
-  <p:timing>
-    <p:tnLst>
-      <p:par>
-        <p:cTn id="1" dur="indefinite" restart="never" nodeType="tmRoot"/>
-      </p:par>
-    </p:tnLst>
-  </p:timing>
-</p:sld>
-</file>
-
-<file path=ppt/slides/slide12.xml><?xml version="1.0" encoding="utf-8"?>
-<p:sld xmlns:a="http://schemas.openxmlformats.org/drawingml/2006/main" xmlns:r="http://schemas.openxmlformats.org/officeDocument/2006/relationships" xmlns:p="http://schemas.openxmlformats.org/presentationml/2006/main">
-  <p:cSld>
-    <p:spTree>
-      <p:nvGrpSpPr>
-        <p:cNvPr id="1" name=""/>
-        <p:cNvGrpSpPr/>
-        <p:nvPr/>
-      </p:nvGrpSpPr>
-      <p:grpSpPr>
-        <a:xfrm>
-          <a:off x="0" y="0"/>
-          <a:ext cx="0" cy="0"/>
-          <a:chOff x="0" y="0"/>
-          <a:chExt cx="0" cy="0"/>
-        </a:xfrm>
-      </p:grpSpPr>
-      <p:sp>
-        <p:nvSpPr>
-          <p:cNvPr id="2" name="Заголовок 1"/>
-          <p:cNvSpPr>
-            <a:spLocks noGrp="1"/>
-          </p:cNvSpPr>
-          <p:nvPr>
-            <p:ph type="title"/>
-          </p:nvPr>
-        </p:nvSpPr>
-        <p:spPr>
-          <a:xfrm>
-            <a:off x="467544" y="620688"/>
-            <a:ext cx="8229600" cy="1143000"/>
-          </a:xfrm>
-        </p:spPr>
-        <p:txBody>
-          <a:bodyPr>
-            <a:normAutofit/>
-          </a:bodyPr>
-          <a:lstStyle/>
-          <a:p>
-            <a:r>
               <a:rPr lang="ru-RU" sz="2400" b="1" dirty="0"/>
               <a:t>Технические меры </a:t>
             </a:r>
@@ -3706,7 +3462,7 @@
 </p:sld>
 </file>
 
-<file path=ppt/slides/slide13.xml><?xml version="1.0" encoding="utf-8"?>
+<file path=ppt/slides/slide11.xml><?xml version="1.0" encoding="utf-8"?>
 <p:sld xmlns:a="http://schemas.openxmlformats.org/drawingml/2006/main" xmlns:r="http://schemas.openxmlformats.org/officeDocument/2006/relationships" xmlns:p="http://schemas.openxmlformats.org/presentationml/2006/main">
   <p:cSld>
     <p:spTree>
@@ -3846,7 +3602,7 @@
 </p:sld>
 </file>
 
-<file path=ppt/slides/slide14.xml><?xml version="1.0" encoding="utf-8"?>
+<file path=ppt/slides/slide12.xml><?xml version="1.0" encoding="utf-8"?>
 <p:sld xmlns:a="http://schemas.openxmlformats.org/drawingml/2006/main" xmlns:r="http://schemas.openxmlformats.org/officeDocument/2006/relationships" xmlns:p="http://schemas.openxmlformats.org/presentationml/2006/main">
   <p:cSld>
     <p:spTree>
@@ -4217,7 +3973,7 @@
 </p:sld>
 </file>
 
-<file path=ppt/slides/slide15.xml><?xml version="1.0" encoding="utf-8"?>
+<file path=ppt/slides/slide13.xml><?xml version="1.0" encoding="utf-8"?>
 <p:sld xmlns:a="http://schemas.openxmlformats.org/drawingml/2006/main" xmlns:r="http://schemas.openxmlformats.org/officeDocument/2006/relationships" xmlns:p="http://schemas.openxmlformats.org/presentationml/2006/main">
   <p:cSld>
     <p:spTree>
@@ -4335,7 +4091,7 @@
 </p:sld>
 </file>
 
-<file path=ppt/slides/slide16.xml><?xml version="1.0" encoding="utf-8"?>
+<file path=ppt/slides/slide14.xml><?xml version="1.0" encoding="utf-8"?>
 <p:sld xmlns:a="http://schemas.openxmlformats.org/drawingml/2006/main" xmlns:r="http://schemas.openxmlformats.org/officeDocument/2006/relationships" xmlns:p="http://schemas.openxmlformats.org/presentationml/2006/main">
   <p:cSld>
     <p:spTree>
@@ -4420,107 +4176,52 @@
       </p:grpSpPr>
       <p:sp>
         <p:nvSpPr>
-          <p:cNvPr id="3" name="Объект 2"/>
-          <p:cNvSpPr>
-            <a:spLocks noGrp="1"/>
-          </p:cNvSpPr>
-          <p:nvPr>
-            <p:ph idx="1"/>
-          </p:nvPr>
+          <p:cNvPr id="4" name="Скругленный прямоугольник 3"/>
+          <p:cNvSpPr/>
+          <p:nvPr/>
         </p:nvSpPr>
         <p:spPr>
           <a:xfrm>
-            <a:off x="899592" y="1196752"/>
-            <a:ext cx="7344816" cy="4525963"/>
+            <a:off x="971600" y="2287413"/>
+            <a:ext cx="3451781" cy="2160240"/>
           </a:xfrm>
+          <a:prstGeom prst="roundRect">
+            <a:avLst/>
+          </a:prstGeom>
+          <a:solidFill>
+            <a:srgbClr val="AADECF"/>
+          </a:solidFill>
+          <a:ln>
+            <a:solidFill>
+              <a:srgbClr val="AADECF"/>
+            </a:solidFill>
+          </a:ln>
         </p:spPr>
-        <p:txBody>
-          <a:bodyPr>
-            <a:noAutofit/>
-          </a:bodyPr>
-          <a:lstStyle/>
-          <a:p>
-            <a:pPr marL="0" indent="541338" algn="just">
-              <a:buNone/>
-            </a:pPr>
-            <a:r>
-              <a:rPr lang="ru-RU" sz="1800" dirty="0" smtClean="0"/>
-              <a:t>В условиях стремительной </a:t>
-            </a:r>
-            <a:r>
-              <a:rPr lang="ru-RU" sz="1800" dirty="0" err="1" smtClean="0"/>
-              <a:t>цифровизации</a:t>
-            </a:r>
-            <a:r>
-              <a:rPr lang="ru-RU" sz="1800" dirty="0" smtClean="0"/>
-              <a:t> вопросы обеспечения безопасности автоматизированных систем (АС) приобретают особую значимость. АС активно используются в государственном управлении, финансовом секторе, здравоохранении, промышленности и других критически важных областях. Утечка, искажение или утрата информации может привести к серьёзным экономическим, </a:t>
-            </a:r>
-            <a:r>
-              <a:rPr lang="ru-RU" sz="1800" dirty="0" err="1" smtClean="0"/>
-              <a:t>репутационным</a:t>
-            </a:r>
-            <a:r>
-              <a:rPr lang="ru-RU" sz="1800" dirty="0" smtClean="0"/>
-              <a:t> и социальным последствиям.</a:t>
-            </a:r>
-          </a:p>
-          <a:p>
-            <a:pPr marL="0" indent="541338" algn="just">
-              <a:buNone/>
-            </a:pPr>
-            <a:r>
-              <a:rPr lang="ru-RU" sz="1800" dirty="0" smtClean="0"/>
-              <a:t>Рост числа </a:t>
-            </a:r>
-            <a:r>
-              <a:rPr lang="ru-RU" sz="1800" dirty="0" err="1" smtClean="0"/>
-              <a:t>киберугроз</a:t>
-            </a:r>
-            <a:r>
-              <a:rPr lang="ru-RU" sz="1800" dirty="0" smtClean="0"/>
-              <a:t> и совершенствование методов атак требуют создания многоуровневых систем защиты — с учётом специфики конкретной АС и актуальных угроз.</a:t>
-            </a:r>
-            <a:endParaRPr lang="ru-RU" sz="1800" dirty="0"/>
-          </a:p>
-        </p:txBody>
-      </p:sp>
-    </p:spTree>
-    <p:extLst>
-      <p:ext uri="{BB962C8B-B14F-4D97-AF65-F5344CB8AC3E}">
-        <p14:creationId xmlns:p14="http://schemas.microsoft.com/office/powerpoint/2010/main" val="1523917254"/>
-      </p:ext>
-    </p:extLst>
-  </p:cSld>
-  <p:clrMapOvr>
-    <a:masterClrMapping/>
-  </p:clrMapOvr>
-  <p:timing>
-    <p:tnLst>
-      <p:par>
-        <p:cTn id="1" dur="indefinite" restart="never" nodeType="tmRoot"/>
-      </p:par>
-    </p:tnLst>
-  </p:timing>
-</p:sld>
-</file>
-
-<file path=ppt/slides/slide3.xml><?xml version="1.0" encoding="utf-8"?>
-<p:sld xmlns:a="http://schemas.openxmlformats.org/drawingml/2006/main" xmlns:r="http://schemas.openxmlformats.org/officeDocument/2006/relationships" xmlns:p="http://schemas.openxmlformats.org/presentationml/2006/main">
-  <p:cSld>
-    <p:spTree>
-      <p:nvGrpSpPr>
-        <p:cNvPr id="1" name=""/>
-        <p:cNvGrpSpPr/>
-        <p:nvPr/>
-      </p:nvGrpSpPr>
-      <p:grpSpPr>
-        <a:xfrm>
-          <a:off x="0" y="0"/>
-          <a:ext cx="0" cy="0"/>
-          <a:chOff x="0" y="0"/>
-          <a:chExt cx="0" cy="0"/>
-        </a:xfrm>
-      </p:grpSpPr>
+        <p:style>
+          <a:lnRef idx="2">
+            <a:schemeClr val="accent1">
+              <a:shade val="50000"/>
+            </a:schemeClr>
+          </a:lnRef>
+          <a:fillRef idx="1">
+            <a:schemeClr val="accent1"/>
+          </a:fillRef>
+          <a:effectRef idx="0">
+            <a:schemeClr val="accent1"/>
+          </a:effectRef>
+          <a:fontRef idx="minor">
+            <a:schemeClr val="lt1"/>
+          </a:fontRef>
+        </p:style>
+        <p:txBody>
+          <a:bodyPr rtlCol="0" anchor="ctr"/>
+          <a:lstStyle/>
+          <a:p>
+            <a:pPr algn="ctr"/>
+            <a:endParaRPr lang="ru-RU"/>
+          </a:p>
+        </p:txBody>
+      </p:sp>
       <p:sp>
         <p:nvSpPr>
           <p:cNvPr id="3" name="Объект 2"/>
@@ -4533,9 +4234,12 @@
         </p:nvSpPr>
         <p:spPr>
           <a:xfrm>
-            <a:off x="827584" y="1124744"/>
-            <a:ext cx="7488832" cy="4525963"/>
+            <a:off x="1043608" y="2719461"/>
+            <a:ext cx="3384376" cy="3949899"/>
           </a:xfrm>
+          <a:ln>
+            <a:noFill/>
+          </a:ln>
         </p:spPr>
         <p:txBody>
           <a:bodyPr>
@@ -4543,40 +4247,279 @@
           </a:bodyPr>
           <a:lstStyle/>
           <a:p>
-            <a:pPr marL="0" indent="541338" algn="just">
+            <a:pPr marL="714375" indent="541338">
+              <a:buNone/>
+            </a:pPr>
+            <a:r>
+              <a:rPr lang="ru-RU" sz="2400" b="1" dirty="0" smtClean="0"/>
+              <a:t>Цель</a:t>
+            </a:r>
+            <a:r>
+              <a:rPr lang="ru-RU" sz="2000" b="1" dirty="0" smtClean="0"/>
+              <a:t> </a:t>
+            </a:r>
+          </a:p>
+          <a:p>
+            <a:pPr marL="0" indent="361950">
               <a:buNone/>
             </a:pPr>
             <a:r>
               <a:rPr lang="ru-RU" sz="1800" dirty="0"/>
-              <a:t>Цель исследования – комплексный теоретический анализ видов мер противодействия угрозам безопасности и изучение основополагающих принципов построения систем обеспечения безопасности информации в автоматизированных системах</a:t>
+              <a:t>М</a:t>
             </a:r>
             <a:r>
               <a:rPr lang="ru-RU" sz="1800" dirty="0" smtClean="0"/>
-              <a:t>.</a:t>
-            </a:r>
-          </a:p>
-          <a:p>
-            <a:pPr marL="0" indent="541338" algn="just">
+              <a:t>еры и основные принципы обеспечения безопасности автоматизированных систем</a:t>
+            </a:r>
+            <a:endParaRPr lang="ru-RU" sz="1800" dirty="0" smtClean="0"/>
+          </a:p>
+          <a:p>
+            <a:pPr marL="0" indent="541338">
+              <a:buNone/>
+            </a:pPr>
+            <a:endParaRPr lang="ru-RU" sz="2400" dirty="0"/>
+          </a:p>
+        </p:txBody>
+      </p:sp>
+      <p:sp>
+        <p:nvSpPr>
+          <p:cNvPr id="6" name="Скругленный прямоугольник 5"/>
+          <p:cNvSpPr/>
+          <p:nvPr/>
+        </p:nvSpPr>
+        <p:spPr>
+          <a:xfrm>
+            <a:off x="4716016" y="2287413"/>
+            <a:ext cx="3451781" cy="2160240"/>
+          </a:xfrm>
+          <a:prstGeom prst="roundRect">
+            <a:avLst/>
+          </a:prstGeom>
+          <a:solidFill>
+            <a:srgbClr val="AADECF"/>
+          </a:solidFill>
+          <a:ln>
+            <a:solidFill>
+              <a:srgbClr val="AADECF"/>
+            </a:solidFill>
+          </a:ln>
+        </p:spPr>
+        <p:style>
+          <a:lnRef idx="2">
+            <a:schemeClr val="accent1">
+              <a:shade val="50000"/>
+            </a:schemeClr>
+          </a:lnRef>
+          <a:fillRef idx="1">
+            <a:schemeClr val="accent1"/>
+          </a:fillRef>
+          <a:effectRef idx="0">
+            <a:schemeClr val="accent1"/>
+          </a:effectRef>
+          <a:fontRef idx="minor">
+            <a:schemeClr val="lt1"/>
+          </a:fontRef>
+        </p:style>
+        <p:txBody>
+          <a:bodyPr rtlCol="0" anchor="ctr"/>
+          <a:lstStyle/>
+          <a:p>
+            <a:pPr algn="ctr"/>
+            <a:endParaRPr lang="ru-RU"/>
+          </a:p>
+        </p:txBody>
+      </p:sp>
+      <p:sp>
+        <p:nvSpPr>
+          <p:cNvPr id="7" name="Объект 2"/>
+          <p:cNvSpPr txBox="1">
+            <a:spLocks/>
+          </p:cNvSpPr>
+          <p:nvPr/>
+        </p:nvSpPr>
+        <p:spPr>
+          <a:xfrm>
+            <a:off x="4788024" y="2719461"/>
+            <a:ext cx="3528392" cy="3949899"/>
+          </a:xfrm>
+          <a:prstGeom prst="rect">
+            <a:avLst/>
+          </a:prstGeom>
+          <a:ln>
+            <a:noFill/>
+          </a:ln>
+        </p:spPr>
+        <p:txBody>
+          <a:bodyPr vert="horz" lIns="91440" tIns="45720" rIns="91440" bIns="45720" rtlCol="0">
+            <a:normAutofit/>
+          </a:bodyPr>
+          <a:lstStyle>
+            <a:lvl1pPr marL="342900" indent="-342900" algn="l" defTabSz="914400" rtl="0" eaLnBrk="1" latinLnBrk="0" hangingPunct="1">
+              <a:spcBef>
+                <a:spcPct val="20000"/>
+              </a:spcBef>
+              <a:buFont typeface="Arial" pitchFamily="34" charset="0"/>
+              <a:buChar char="•"/>
+              <a:defRPr sz="3200" kern="1200">
+                <a:solidFill>
+                  <a:schemeClr val="tx1"/>
+                </a:solidFill>
+                <a:latin typeface="+mn-lt"/>
+                <a:ea typeface="+mn-ea"/>
+                <a:cs typeface="+mn-cs"/>
+              </a:defRPr>
+            </a:lvl1pPr>
+            <a:lvl2pPr marL="742950" indent="-285750" algn="l" defTabSz="914400" rtl="0" eaLnBrk="1" latinLnBrk="0" hangingPunct="1">
+              <a:spcBef>
+                <a:spcPct val="20000"/>
+              </a:spcBef>
+              <a:buFont typeface="Arial" pitchFamily="34" charset="0"/>
+              <a:buChar char="–"/>
+              <a:defRPr sz="2800" kern="1200">
+                <a:solidFill>
+                  <a:schemeClr val="tx1"/>
+                </a:solidFill>
+                <a:latin typeface="+mn-lt"/>
+                <a:ea typeface="+mn-ea"/>
+                <a:cs typeface="+mn-cs"/>
+              </a:defRPr>
+            </a:lvl2pPr>
+            <a:lvl3pPr marL="1143000" indent="-228600" algn="l" defTabSz="914400" rtl="0" eaLnBrk="1" latinLnBrk="0" hangingPunct="1">
+              <a:spcBef>
+                <a:spcPct val="20000"/>
+              </a:spcBef>
+              <a:buFont typeface="Arial" pitchFamily="34" charset="0"/>
+              <a:buChar char="•"/>
+              <a:defRPr sz="2400" kern="1200">
+                <a:solidFill>
+                  <a:schemeClr val="tx1"/>
+                </a:solidFill>
+                <a:latin typeface="+mn-lt"/>
+                <a:ea typeface="+mn-ea"/>
+                <a:cs typeface="+mn-cs"/>
+              </a:defRPr>
+            </a:lvl3pPr>
+            <a:lvl4pPr marL="1600200" indent="-228600" algn="l" defTabSz="914400" rtl="0" eaLnBrk="1" latinLnBrk="0" hangingPunct="1">
+              <a:spcBef>
+                <a:spcPct val="20000"/>
+              </a:spcBef>
+              <a:buFont typeface="Arial" pitchFamily="34" charset="0"/>
+              <a:buChar char="–"/>
+              <a:defRPr sz="2000" kern="1200">
+                <a:solidFill>
+                  <a:schemeClr val="tx1"/>
+                </a:solidFill>
+                <a:latin typeface="+mn-lt"/>
+                <a:ea typeface="+mn-ea"/>
+                <a:cs typeface="+mn-cs"/>
+              </a:defRPr>
+            </a:lvl4pPr>
+            <a:lvl5pPr marL="2057400" indent="-228600" algn="l" defTabSz="914400" rtl="0" eaLnBrk="1" latinLnBrk="0" hangingPunct="1">
+              <a:spcBef>
+                <a:spcPct val="20000"/>
+              </a:spcBef>
+              <a:buFont typeface="Arial" pitchFamily="34" charset="0"/>
+              <a:buChar char="»"/>
+              <a:defRPr sz="2000" kern="1200">
+                <a:solidFill>
+                  <a:schemeClr val="tx1"/>
+                </a:solidFill>
+                <a:latin typeface="+mn-lt"/>
+                <a:ea typeface="+mn-ea"/>
+                <a:cs typeface="+mn-cs"/>
+              </a:defRPr>
+            </a:lvl5pPr>
+            <a:lvl6pPr marL="2514600" indent="-228600" algn="l" defTabSz="914400" rtl="0" eaLnBrk="1" latinLnBrk="0" hangingPunct="1">
+              <a:spcBef>
+                <a:spcPct val="20000"/>
+              </a:spcBef>
+              <a:buFont typeface="Arial" pitchFamily="34" charset="0"/>
+              <a:buChar char="•"/>
+              <a:defRPr sz="2000" kern="1200">
+                <a:solidFill>
+                  <a:schemeClr val="tx1"/>
+                </a:solidFill>
+                <a:latin typeface="+mn-lt"/>
+                <a:ea typeface="+mn-ea"/>
+                <a:cs typeface="+mn-cs"/>
+              </a:defRPr>
+            </a:lvl6pPr>
+            <a:lvl7pPr marL="2971800" indent="-228600" algn="l" defTabSz="914400" rtl="0" eaLnBrk="1" latinLnBrk="0" hangingPunct="1">
+              <a:spcBef>
+                <a:spcPct val="20000"/>
+              </a:spcBef>
+              <a:buFont typeface="Arial" pitchFamily="34" charset="0"/>
+              <a:buChar char="•"/>
+              <a:defRPr sz="2000" kern="1200">
+                <a:solidFill>
+                  <a:schemeClr val="tx1"/>
+                </a:solidFill>
+                <a:latin typeface="+mn-lt"/>
+                <a:ea typeface="+mn-ea"/>
+                <a:cs typeface="+mn-cs"/>
+              </a:defRPr>
+            </a:lvl7pPr>
+            <a:lvl8pPr marL="3429000" indent="-228600" algn="l" defTabSz="914400" rtl="0" eaLnBrk="1" latinLnBrk="0" hangingPunct="1">
+              <a:spcBef>
+                <a:spcPct val="20000"/>
+              </a:spcBef>
+              <a:buFont typeface="Arial" pitchFamily="34" charset="0"/>
+              <a:buChar char="•"/>
+              <a:defRPr sz="2000" kern="1200">
+                <a:solidFill>
+                  <a:schemeClr val="tx1"/>
+                </a:solidFill>
+                <a:latin typeface="+mn-lt"/>
+                <a:ea typeface="+mn-ea"/>
+                <a:cs typeface="+mn-cs"/>
+              </a:defRPr>
+            </a:lvl8pPr>
+            <a:lvl9pPr marL="3886200" indent="-228600" algn="l" defTabSz="914400" rtl="0" eaLnBrk="1" latinLnBrk="0" hangingPunct="1">
+              <a:spcBef>
+                <a:spcPct val="20000"/>
+              </a:spcBef>
+              <a:buFont typeface="Arial" pitchFamily="34" charset="0"/>
+              <a:buChar char="•"/>
+              <a:defRPr sz="2000" kern="1200">
+                <a:solidFill>
+                  <a:schemeClr val="tx1"/>
+                </a:solidFill>
+                <a:latin typeface="+mn-lt"/>
+                <a:ea typeface="+mn-ea"/>
+                <a:cs typeface="+mn-cs"/>
+              </a:defRPr>
+            </a:lvl9pPr>
+          </a:lstStyle>
+          <a:p>
+            <a:pPr marL="714375" indent="541338">
+              <a:buFont typeface="Arial" pitchFamily="34" charset="0"/>
+              <a:buNone/>
+            </a:pPr>
+            <a:r>
+              <a:rPr lang="ru-RU" sz="2400" b="1" dirty="0" smtClean="0"/>
+              <a:t>Объект</a:t>
+            </a:r>
+            <a:r>
+              <a:rPr lang="ru-RU" sz="2000" b="1" dirty="0" smtClean="0"/>
+              <a:t> </a:t>
+            </a:r>
+          </a:p>
+          <a:p>
+            <a:pPr marL="0" indent="361950">
               <a:buNone/>
             </a:pPr>
             <a:r>
               <a:rPr lang="ru-RU" sz="1800" dirty="0"/>
-              <a:t>Объект исследования – автоматизированные системы обработки информации различного назначения.</a:t>
-            </a:r>
-          </a:p>
-          <a:p>
-            <a:pPr marL="0" indent="541338" algn="just">
-              <a:buNone/>
-            </a:pPr>
+              <a:t>А</a:t>
+            </a:r>
+            <a:r>
+              <a:rPr lang="ru-RU" sz="1800" dirty="0" smtClean="0"/>
+              <a:t>втоматизированные </a:t>
+            </a:r>
             <a:r>
               <a:rPr lang="ru-RU" sz="1800" dirty="0"/>
-              <a:t>Предмет исследования – совокупность мер защиты (правовых, организационных, технических и др.) и организационно-технических принципов, направленных на обеспечение информационной безопасности автоматизированных систем.</a:t>
-            </a:r>
-          </a:p>
-          <a:p>
-            <a:pPr marL="0" indent="541338">
-              <a:buNone/>
-            </a:pPr>
+              <a:t>системы обработки информации различного назначения</a:t>
+            </a:r>
             <a:endParaRPr lang="ru-RU" sz="2400" dirty="0"/>
           </a:p>
         </p:txBody>
@@ -4601,118 +4544,7 @@
 </p:sld>
 </file>
 
-<file path=ppt/slides/slide4.xml><?xml version="1.0" encoding="utf-8"?>
-<p:sld xmlns:a="http://schemas.openxmlformats.org/drawingml/2006/main" xmlns:r="http://schemas.openxmlformats.org/officeDocument/2006/relationships" xmlns:p="http://schemas.openxmlformats.org/presentationml/2006/main">
-  <p:cSld>
-    <p:spTree>
-      <p:nvGrpSpPr>
-        <p:cNvPr id="1" name=""/>
-        <p:cNvGrpSpPr/>
-        <p:nvPr/>
-      </p:nvGrpSpPr>
-      <p:grpSpPr>
-        <a:xfrm>
-          <a:off x="0" y="0"/>
-          <a:ext cx="0" cy="0"/>
-          <a:chOff x="0" y="0"/>
-          <a:chExt cx="0" cy="0"/>
-        </a:xfrm>
-      </p:grpSpPr>
-      <p:sp>
-        <p:nvSpPr>
-          <p:cNvPr id="3" name="Объект 2"/>
-          <p:cNvSpPr>
-            <a:spLocks noGrp="1"/>
-          </p:cNvSpPr>
-          <p:nvPr>
-            <p:ph idx="1"/>
-          </p:nvPr>
-        </p:nvSpPr>
-        <p:spPr>
-          <a:xfrm>
-            <a:off x="827584" y="1052736"/>
-            <a:ext cx="7488832" cy="4525963"/>
-          </a:xfrm>
-        </p:spPr>
-        <p:txBody>
-          <a:bodyPr>
-            <a:normAutofit/>
-          </a:bodyPr>
-          <a:lstStyle/>
-          <a:p>
-            <a:pPr marL="0" indent="541338">
-              <a:buNone/>
-            </a:pPr>
-            <a:r>
-              <a:rPr lang="ru-RU" sz="1800" dirty="0" smtClean="0"/>
-              <a:t>Для достижения поставленной цели необходимо решить следующие задачи:</a:t>
-            </a:r>
-          </a:p>
-          <a:p>
-            <a:pPr marL="0" indent="541338">
-              <a:buNone/>
-            </a:pPr>
-            <a:r>
-              <a:rPr lang="ru-RU" sz="1800" dirty="0" smtClean="0"/>
-              <a:t>–	рассмотреть виды мер противодействия угрозам безопасности информации в автоматизированных системах;</a:t>
-            </a:r>
-          </a:p>
-          <a:p>
-            <a:pPr marL="0" indent="541338">
-              <a:buNone/>
-            </a:pPr>
-            <a:r>
-              <a:rPr lang="ru-RU" sz="1800" dirty="0" smtClean="0"/>
-              <a:t>–	проанализировать ключевые принципы построения системы обеспечения безопасности информации и их роль в создании надёжной защиты;</a:t>
-            </a:r>
-          </a:p>
-          <a:p>
-            <a:pPr marL="0" indent="541338">
-              <a:buNone/>
-            </a:pPr>
-            <a:r>
-              <a:rPr lang="ru-RU" sz="1800" dirty="0" smtClean="0"/>
-              <a:t>–	обосновать необходимость применения системного и комплексного подходов к защите АС на всех этапах их жизненного цикла;</a:t>
-            </a:r>
-          </a:p>
-          <a:p>
-            <a:pPr marL="0" indent="541338">
-              <a:buNone/>
-            </a:pPr>
-            <a:r>
-              <a:rPr lang="ru-RU" sz="1800" dirty="0" smtClean="0"/>
-              <a:t>–	выявить сильные и слабые стороны различных мер защиты, оценить их применимость в зависимости от типа АС и характера угроз.</a:t>
-            </a:r>
-          </a:p>
-          <a:p>
-            <a:pPr marL="0" indent="541338">
-              <a:buNone/>
-            </a:pPr>
-            <a:endParaRPr lang="ru-RU" sz="2000" dirty="0"/>
-          </a:p>
-        </p:txBody>
-      </p:sp>
-    </p:spTree>
-    <p:extLst>
-      <p:ext uri="{BB962C8B-B14F-4D97-AF65-F5344CB8AC3E}">
-        <p14:creationId xmlns:p14="http://schemas.microsoft.com/office/powerpoint/2010/main" val="279211591"/>
-      </p:ext>
-    </p:extLst>
-  </p:cSld>
-  <p:clrMapOvr>
-    <a:masterClrMapping/>
-  </p:clrMapOvr>
-  <p:timing>
-    <p:tnLst>
-      <p:par>
-        <p:cTn id="1" dur="indefinite" restart="never" nodeType="tmRoot"/>
-      </p:par>
-    </p:tnLst>
-  </p:timing>
-</p:sld>
-</file>
-
-<file path=ppt/slides/slide5.xml><?xml version="1.0" encoding="utf-8"?>
+<file path=ppt/slides/slide3.xml><?xml version="1.0" encoding="utf-8"?>
 <p:sld xmlns:a="http://schemas.openxmlformats.org/drawingml/2006/main" xmlns:r="http://schemas.openxmlformats.org/officeDocument/2006/relationships" xmlns:p="http://schemas.openxmlformats.org/presentationml/2006/main">
   <p:cSld>
     <p:spTree>
@@ -4788,7 +4620,7 @@
 </p:sld>
 </file>
 
-<file path=ppt/slides/slide6.xml><?xml version="1.0" encoding="utf-8"?>
+<file path=ppt/slides/slide4.xml><?xml version="1.0" encoding="utf-8"?>
 <p:sld xmlns:a="http://schemas.openxmlformats.org/drawingml/2006/main" xmlns:r="http://schemas.openxmlformats.org/officeDocument/2006/relationships" xmlns:p="http://schemas.openxmlformats.org/presentationml/2006/main">
   <p:cSld>
     <p:spTree>
@@ -4925,6 +4757,276 @@
 </p:sld>
 </file>
 
+<file path=ppt/slides/slide5.xml><?xml version="1.0" encoding="utf-8"?>
+<p:sld xmlns:a="http://schemas.openxmlformats.org/drawingml/2006/main" xmlns:r="http://schemas.openxmlformats.org/officeDocument/2006/relationships" xmlns:p="http://schemas.openxmlformats.org/presentationml/2006/main">
+  <p:cSld>
+    <p:spTree>
+      <p:nvGrpSpPr>
+        <p:cNvPr id="1" name=""/>
+        <p:cNvGrpSpPr/>
+        <p:nvPr/>
+      </p:nvGrpSpPr>
+      <p:grpSpPr>
+        <a:xfrm>
+          <a:off x="0" y="0"/>
+          <a:ext cx="0" cy="0"/>
+          <a:chOff x="0" y="0"/>
+          <a:chExt cx="0" cy="0"/>
+        </a:xfrm>
+      </p:grpSpPr>
+      <p:sp>
+        <p:nvSpPr>
+          <p:cNvPr id="2" name="Заголовок 1"/>
+          <p:cNvSpPr>
+            <a:spLocks noGrp="1"/>
+          </p:cNvSpPr>
+          <p:nvPr>
+            <p:ph type="title"/>
+          </p:nvPr>
+        </p:nvSpPr>
+        <p:spPr>
+          <a:xfrm>
+            <a:off x="467544" y="620688"/>
+            <a:ext cx="8229600" cy="1143000"/>
+          </a:xfrm>
+        </p:spPr>
+        <p:txBody>
+          <a:bodyPr>
+            <a:normAutofit/>
+          </a:bodyPr>
+          <a:lstStyle/>
+          <a:p>
+            <a:r>
+              <a:rPr lang="ru-RU" sz="2400" b="1" dirty="0"/>
+              <a:t>Законодательные (Правовые) меры</a:t>
+            </a:r>
+            <a:r>
+              <a:rPr lang="ru-RU" sz="2400" dirty="0"/>
+              <a:t> </a:t>
+            </a:r>
+          </a:p>
+        </p:txBody>
+      </p:sp>
+      <p:sp>
+        <p:nvSpPr>
+          <p:cNvPr id="3" name="Объект 2"/>
+          <p:cNvSpPr>
+            <a:spLocks noGrp="1"/>
+          </p:cNvSpPr>
+          <p:nvPr>
+            <p:ph idx="1"/>
+          </p:nvPr>
+        </p:nvSpPr>
+        <p:spPr>
+          <a:xfrm>
+            <a:off x="971600" y="1600200"/>
+            <a:ext cx="7128792" cy="4525963"/>
+          </a:xfrm>
+        </p:spPr>
+        <p:txBody>
+          <a:bodyPr>
+            <a:normAutofit lnSpcReduction="10000"/>
+          </a:bodyPr>
+          <a:lstStyle/>
+          <a:p>
+            <a:pPr marL="0" indent="541338">
+              <a:buNone/>
+            </a:pPr>
+            <a:r>
+              <a:rPr lang="ru-RU" sz="2000" dirty="0" smtClean="0"/>
+              <a:t>Некоторые ключевые законодательные акты в России:</a:t>
+            </a:r>
+          </a:p>
+          <a:p>
+            <a:pPr marL="0" indent="541338">
+              <a:buNone/>
+            </a:pPr>
+            <a:r>
+              <a:rPr lang="ru-RU" sz="2000" dirty="0" smtClean="0"/>
+              <a:t>–	Конституция Российской Федерации </a:t>
+            </a:r>
+          </a:p>
+          <a:p>
+            <a:pPr marL="0" indent="541338">
+              <a:buNone/>
+            </a:pPr>
+            <a:r>
+              <a:rPr lang="ru-RU" sz="2000" dirty="0" smtClean="0"/>
+              <a:t>–	Федеральный закон от 27.07.2006, г., № 149-ФЗ «Об информации, информационных технологиях и о защите информации» </a:t>
+            </a:r>
+          </a:p>
+          <a:p>
+            <a:pPr marL="0" indent="541338">
+              <a:buNone/>
+            </a:pPr>
+            <a:r>
+              <a:rPr lang="ru-RU" sz="2000" dirty="0" smtClean="0"/>
+              <a:t>–	Федеральный закон от 27 июля 2006 г. №152-ФЗ «О персональных данных».</a:t>
+            </a:r>
+          </a:p>
+          <a:p>
+            <a:pPr marL="0" indent="541338">
+              <a:buNone/>
+            </a:pPr>
+            <a:r>
+              <a:rPr lang="ru-RU" sz="2000" dirty="0" smtClean="0"/>
+              <a:t>–	Федеральный закон от 29 июля 2004 г. №98-ФЗ «О коммерческой тайне».</a:t>
+            </a:r>
+          </a:p>
+          <a:p>
+            <a:pPr marL="0" indent="541338">
+              <a:buNone/>
+            </a:pPr>
+            <a:r>
+              <a:rPr lang="ru-RU" sz="2000" dirty="0" smtClean="0"/>
+              <a:t>–	Федеральный закон от 6 апреля 2011 г. № 63-ФЗ «Об электронной подписи».</a:t>
+            </a:r>
+          </a:p>
+          <a:p>
+            <a:pPr marL="0" indent="541338">
+              <a:buNone/>
+            </a:pPr>
+            <a:r>
+              <a:rPr lang="ru-RU" sz="2000" dirty="0" smtClean="0"/>
+              <a:t>–	Федеральный закон от 26 июля 2017 г. № 187-ФЗ "О безопасности критической информационной инфраструктуры Российской Федерации" </a:t>
+            </a:r>
+            <a:endParaRPr lang="ru-RU" dirty="0"/>
+          </a:p>
+        </p:txBody>
+      </p:sp>
+    </p:spTree>
+    <p:extLst>
+      <p:ext uri="{BB962C8B-B14F-4D97-AF65-F5344CB8AC3E}">
+        <p14:creationId xmlns:p14="http://schemas.microsoft.com/office/powerpoint/2010/main" val="1000465775"/>
+      </p:ext>
+    </p:extLst>
+  </p:cSld>
+  <p:clrMapOvr>
+    <a:masterClrMapping/>
+  </p:clrMapOvr>
+</p:sld>
+</file>
+
+<file path=ppt/slides/slide6.xml><?xml version="1.0" encoding="utf-8"?>
+<p:sld xmlns:a="http://schemas.openxmlformats.org/drawingml/2006/main" xmlns:r="http://schemas.openxmlformats.org/officeDocument/2006/relationships" xmlns:p="http://schemas.openxmlformats.org/presentationml/2006/main">
+  <p:cSld>
+    <p:spTree>
+      <p:nvGrpSpPr>
+        <p:cNvPr id="1" name=""/>
+        <p:cNvGrpSpPr/>
+        <p:nvPr/>
+      </p:nvGrpSpPr>
+      <p:grpSpPr>
+        <a:xfrm>
+          <a:off x="0" y="0"/>
+          <a:ext cx="0" cy="0"/>
+          <a:chOff x="0" y="0"/>
+          <a:chExt cx="0" cy="0"/>
+        </a:xfrm>
+      </p:grpSpPr>
+      <p:sp>
+        <p:nvSpPr>
+          <p:cNvPr id="2" name="Заголовок 1"/>
+          <p:cNvSpPr>
+            <a:spLocks noGrp="1"/>
+          </p:cNvSpPr>
+          <p:nvPr>
+            <p:ph type="title"/>
+          </p:nvPr>
+        </p:nvSpPr>
+        <p:spPr>
+          <a:xfrm>
+            <a:off x="467544" y="620688"/>
+            <a:ext cx="8229600" cy="1143000"/>
+          </a:xfrm>
+        </p:spPr>
+        <p:txBody>
+          <a:bodyPr>
+            <a:normAutofit/>
+          </a:bodyPr>
+          <a:lstStyle/>
+          <a:p>
+            <a:r>
+              <a:rPr lang="ru-RU" sz="2400" b="1" dirty="0" smtClean="0"/>
+              <a:t>Морально-этические меры</a:t>
+            </a:r>
+            <a:endParaRPr lang="ru-RU" sz="2400" dirty="0"/>
+          </a:p>
+        </p:txBody>
+      </p:sp>
+      <p:sp>
+        <p:nvSpPr>
+          <p:cNvPr id="3" name="Объект 2"/>
+          <p:cNvSpPr>
+            <a:spLocks noGrp="1"/>
+          </p:cNvSpPr>
+          <p:nvPr>
+            <p:ph idx="1"/>
+          </p:nvPr>
+        </p:nvSpPr>
+        <p:spPr>
+          <a:xfrm>
+            <a:off x="971600" y="1600200"/>
+            <a:ext cx="7128792" cy="4525963"/>
+          </a:xfrm>
+        </p:spPr>
+        <p:txBody>
+          <a:bodyPr>
+            <a:normAutofit/>
+          </a:bodyPr>
+          <a:lstStyle/>
+          <a:p>
+            <a:pPr marL="0" indent="541338">
+              <a:buNone/>
+            </a:pPr>
+            <a:r>
+              <a:rPr lang="ru-RU" sz="2000" dirty="0"/>
+              <a:t>П</a:t>
+            </a:r>
+            <a:r>
+              <a:rPr lang="ru-RU" sz="2000" dirty="0" smtClean="0"/>
+              <a:t>редполагают соблюдение норм поведения, которые традиционно сложились или складываются по мере распространения информационных технологий в обществе. Эти нормы большей частью не являются обязательными, как требования нормативных актов, однако, их несоблюдение ведёт обычно к падению авторитета или престижа человека, группы лиц или организации. </a:t>
+            </a:r>
+          </a:p>
+          <a:p>
+            <a:pPr marL="0" indent="541338">
+              <a:buNone/>
+            </a:pPr>
+            <a:r>
+              <a:rPr lang="ru-RU" sz="2000" dirty="0" smtClean="0"/>
+              <a:t>Плюсы: формируют внутренние барьеры против нарушений, снижают потребность в тотальном контроле, не требуют затрат.</a:t>
+            </a:r>
+          </a:p>
+          <a:p>
+            <a:pPr marL="0" indent="541338">
+              <a:buNone/>
+            </a:pPr>
+            <a:r>
+              <a:rPr lang="ru-RU" sz="2000" dirty="0" smtClean="0"/>
+              <a:t>Минусы: рекомендательный характер, зависят от личных качеств сотрудников.</a:t>
+            </a:r>
+          </a:p>
+          <a:p>
+            <a:pPr marL="0" indent="541338">
+              <a:buNone/>
+            </a:pPr>
+            <a:endParaRPr lang="ru-RU" dirty="0"/>
+          </a:p>
+        </p:txBody>
+      </p:sp>
+    </p:spTree>
+    <p:extLst>
+      <p:ext uri="{BB962C8B-B14F-4D97-AF65-F5344CB8AC3E}">
+        <p14:creationId xmlns:p14="http://schemas.microsoft.com/office/powerpoint/2010/main" val="141116480"/>
+      </p:ext>
+    </p:extLst>
+  </p:cSld>
+  <p:clrMapOvr>
+    <a:masterClrMapping/>
+  </p:clrMapOvr>
+</p:sld>
+</file>
+
 <file path=ppt/slides/slide7.xml><?xml version="1.0" encoding="utf-8"?>
 <p:sld xmlns:a="http://schemas.openxmlformats.org/drawingml/2006/main" xmlns:r="http://schemas.openxmlformats.org/officeDocument/2006/relationships" xmlns:p="http://schemas.openxmlformats.org/presentationml/2006/main">
   <p:cSld>
@@ -4965,13 +5067,10 @@
           <a:lstStyle/>
           <a:p>
             <a:r>
-              <a:rPr lang="ru-RU" sz="2400" b="1" dirty="0"/>
-              <a:t>Законодательные (Правовые) меры</a:t>
-            </a:r>
-            <a:r>
-              <a:rPr lang="ru-RU" sz="2400" dirty="0"/>
-              <a:t> </a:t>
-            </a:r>
+              <a:rPr lang="ru-RU" sz="2400" b="1" dirty="0" smtClean="0"/>
+              <a:t>Организационные меры</a:t>
+            </a:r>
+            <a:endParaRPr lang="ru-RU" sz="2400" dirty="0"/>
           </a:p>
         </p:txBody>
       </p:sp>
@@ -4993,7 +5092,7 @@
         </p:spPr>
         <p:txBody>
           <a:bodyPr>
-            <a:normAutofit lnSpcReduction="10000"/>
+            <a:normAutofit/>
           </a:bodyPr>
           <a:lstStyle/>
           <a:p>
@@ -5002,7 +5101,11 @@
             </a:pPr>
             <a:r>
               <a:rPr lang="ru-RU" sz="2000" dirty="0" smtClean="0"/>
-              <a:t>Некоторые ключевые законодательные акты в России:</a:t>
+              <a:t>Меры административного характера, которые устанавливают правила функционирования системы обработки данных и деятельности обслуживающего персонала, а также порядок их взаимодействия для снижения вероятности осуществления угроз безопасности или потерь в случае их реализации.</a:t>
+            </a:r>
+            <a:r>
+              <a:rPr lang="en-US" sz="2000" dirty="0" smtClean="0"/>
+              <a:t> </a:t>
             </a:r>
           </a:p>
           <a:p>
@@ -5011,7 +5114,7 @@
             </a:pPr>
             <a:r>
               <a:rPr lang="ru-RU" sz="2000" dirty="0" smtClean="0"/>
-              <a:t>–	Конституция Российской Федерации </a:t>
+              <a:t>Плюсы: нейтрализуют «человеческий фактор», объединяют элементы защиты в систему, помогают выявлять внутренних нарушителей.</a:t>
             </a:r>
           </a:p>
           <a:p>
@@ -5020,44 +5123,14 @@
             </a:pPr>
             <a:r>
               <a:rPr lang="ru-RU" sz="2000" dirty="0" smtClean="0"/>
-              <a:t>–	Федеральный закон от 27.07.2006, г., № 149-ФЗ «Об информации, информационных технологиях и о защите информации» </a:t>
-            </a:r>
+              <a:t>Минусы: бюрократизация процессов, теряют эффективность без жёсткого контроля.</a:t>
+            </a:r>
+            <a:endParaRPr lang="en-US" sz="2000" dirty="0" smtClean="0"/>
           </a:p>
           <a:p>
             <a:pPr marL="0" indent="541338">
               <a:buNone/>
             </a:pPr>
-            <a:r>
-              <a:rPr lang="ru-RU" sz="2000" dirty="0" smtClean="0"/>
-              <a:t>–	Федеральный закон от 27 июля 2006 г. №152-ФЗ «О персональных данных».</a:t>
-            </a:r>
-          </a:p>
-          <a:p>
-            <a:pPr marL="0" indent="541338">
-              <a:buNone/>
-            </a:pPr>
-            <a:r>
-              <a:rPr lang="ru-RU" sz="2000" dirty="0" smtClean="0"/>
-              <a:t>–	Федеральный закон от 29 июля 2004 г. №98-ФЗ «О коммерческой тайне».</a:t>
-            </a:r>
-          </a:p>
-          <a:p>
-            <a:pPr marL="0" indent="541338">
-              <a:buNone/>
-            </a:pPr>
-            <a:r>
-              <a:rPr lang="ru-RU" sz="2000" dirty="0" smtClean="0"/>
-              <a:t>–	Федеральный закон от 6 апреля 2011 г. № 63-ФЗ «Об электронной подписи».</a:t>
-            </a:r>
-          </a:p>
-          <a:p>
-            <a:pPr marL="0" indent="541338">
-              <a:buNone/>
-            </a:pPr>
-            <a:r>
-              <a:rPr lang="ru-RU" sz="2000" dirty="0" smtClean="0"/>
-              <a:t>–	Федеральный закон от 26 июля 2017 г. № 187-ФЗ "О безопасности критической информационной инфраструктуры Российской Федерации" </a:t>
-            </a:r>
             <a:endParaRPr lang="ru-RU" dirty="0"/>
           </a:p>
         </p:txBody>
@@ -5065,7 +5138,7 @@
     </p:spTree>
     <p:extLst>
       <p:ext uri="{BB962C8B-B14F-4D97-AF65-F5344CB8AC3E}">
-        <p14:creationId xmlns:p14="http://schemas.microsoft.com/office/powerpoint/2010/main" val="1000465775"/>
+        <p14:creationId xmlns:p14="http://schemas.microsoft.com/office/powerpoint/2010/main" val="3811156062"/>
       </p:ext>
     </p:extLst>
   </p:cSld>
@@ -5116,7 +5189,7 @@
           <a:p>
             <a:r>
               <a:rPr lang="ru-RU" sz="2400" b="1" dirty="0" smtClean="0"/>
-              <a:t>Морально-этические меры</a:t>
+              <a:t>Технологические меры</a:t>
             </a:r>
             <a:endParaRPr lang="ru-RU" sz="2400" dirty="0"/>
           </a:p>
@@ -5153,7 +5226,11 @@
             </a:r>
             <a:r>
               <a:rPr lang="ru-RU" sz="2000" dirty="0" smtClean="0"/>
-              <a:t>редполагают соблюдение норм поведения, которые традиционно сложились или складываются по мере распространения информационных технологий в обществе. Эти нормы большей частью не являются обязательными, как требования нормативных актов, однако, их несоблюдение ведёт обычно к падению авторитета или престижа человека, группы лиц или организации. </a:t>
+              <a:t>редусматривают такие технологические решения и приемы, которые основаны на принципе избыточности (структурной, функциональной, информационной, временной и т. п.) и направлены на уменьшение возможности совершения сотрудниками ошибок и нарушений в рамках мандатного доступа.</a:t>
+            </a:r>
+            <a:r>
+              <a:rPr lang="en-US" sz="2000" dirty="0" smtClean="0"/>
+              <a:t> </a:t>
             </a:r>
           </a:p>
           <a:p>
@@ -5162,7 +5239,7 @@
             </a:pPr>
             <a:r>
               <a:rPr lang="ru-RU" sz="2000" dirty="0" smtClean="0"/>
-              <a:t>Плюсы: формируют внутренние барьеры против нарушений, снижают потребность в тотальном контроле, не требуют затрат.</a:t>
+              <a:t>Плюсы: автоматическая работа без участия человека, жёсткий контроль данных на всех этапах обработки.</a:t>
             </a:r>
           </a:p>
           <a:p>
@@ -5171,21 +5248,16 @@
             </a:pPr>
             <a:r>
               <a:rPr lang="ru-RU" sz="2000" dirty="0" smtClean="0"/>
-              <a:t>Минусы: рекомендательный характер, зависят от личных качеств сотрудников.</a:t>
-            </a:r>
-          </a:p>
-          <a:p>
-            <a:pPr marL="0" indent="541338">
-              <a:buNone/>
-            </a:pPr>
-            <a:endParaRPr lang="ru-RU" dirty="0"/>
+              <a:t>Минусы: требуют сложного проектирования на ранних стадиях, снижают гибкость процессов.</a:t>
+            </a:r>
+            <a:endParaRPr lang="en-US" sz="2000" dirty="0" smtClean="0"/>
           </a:p>
         </p:txBody>
       </p:sp>
     </p:spTree>
     <p:extLst>
       <p:ext uri="{BB962C8B-B14F-4D97-AF65-F5344CB8AC3E}">
-        <p14:creationId xmlns:p14="http://schemas.microsoft.com/office/powerpoint/2010/main" val="141116480"/>
+        <p14:creationId xmlns:p14="http://schemas.microsoft.com/office/powerpoint/2010/main" val="1570676687"/>
       </p:ext>
     </p:extLst>
   </p:cSld>
@@ -5236,7 +5308,7 @@
           <a:p>
             <a:r>
               <a:rPr lang="ru-RU" sz="2400" b="1" dirty="0" smtClean="0"/>
-              <a:t>Организационные меры</a:t>
+              <a:t>Физические меры</a:t>
             </a:r>
             <a:endParaRPr lang="ru-RU" sz="2400" dirty="0"/>
           </a:p>
@@ -5269,11 +5341,7 @@
             </a:pPr>
             <a:r>
               <a:rPr lang="ru-RU" sz="2000" dirty="0" smtClean="0"/>
-              <a:t>Меры административного характера, которые устанавливают правила функционирования системы обработки данных и деятельности обслуживающего персонала, а также порядок их взаимодействия для снижения вероятности осуществления угроз безопасности или потерь в случае их реализации.</a:t>
-            </a:r>
-            <a:r>
-              <a:rPr lang="en-US" sz="2000" dirty="0" smtClean="0"/>
-              <a:t> </a:t>
+              <a:t>Под ними понимают физические препятствия на возможных путях проникновения потенциальных нарушителей к компонентам системы. </a:t>
             </a:r>
           </a:p>
           <a:p>
@@ -5281,8 +5349,8 @@
               <a:buNone/>
             </a:pPr>
             <a:r>
-              <a:rPr lang="ru-RU" sz="2000" dirty="0" smtClean="0"/>
-              <a:t>Плюсы: нейтрализуют «человеческий фактор», объединяют элементы защиты в систему, помогают выявлять внутренних нарушителей.</a:t>
+              <a:rPr lang="ru-RU" sz="2000" dirty="0"/>
+              <a:t>Плюсы: барьер против хищения оборудования, защита от аварий (пожаров, затоплений), психологическое отпугивание нарушителей.</a:t>
             </a:r>
           </a:p>
           <a:p>
@@ -5290,29 +5358,35 @@
               <a:buNone/>
             </a:pPr>
             <a:r>
-              <a:rPr lang="ru-RU" sz="2000" dirty="0" smtClean="0"/>
-              <a:t>Минусы: бюрократизация процессов, теряют эффективность без жёсткого контроля.</a:t>
-            </a:r>
-            <a:endParaRPr lang="en-US" sz="2000" dirty="0" smtClean="0"/>
+              <a:rPr lang="ru-RU" sz="2000" dirty="0"/>
+              <a:t>Минусы: бесполезны против удалённых атак, требуют постоянных затрат на охрану и оборудование.</a:t>
+            </a:r>
           </a:p>
           <a:p>
             <a:pPr marL="0" indent="541338">
               <a:buNone/>
             </a:pPr>
-            <a:endParaRPr lang="ru-RU" dirty="0"/>
+            <a:endParaRPr lang="ru-RU" sz="2000" dirty="0" smtClean="0"/>
           </a:p>
         </p:txBody>
       </p:sp>
     </p:spTree>
     <p:extLst>
       <p:ext uri="{BB962C8B-B14F-4D97-AF65-F5344CB8AC3E}">
-        <p14:creationId xmlns:p14="http://schemas.microsoft.com/office/powerpoint/2010/main" val="3811156062"/>
+        <p14:creationId xmlns:p14="http://schemas.microsoft.com/office/powerpoint/2010/main" val="1893546727"/>
       </p:ext>
     </p:extLst>
   </p:cSld>
   <p:clrMapOvr>
     <a:masterClrMapping/>
   </p:clrMapOvr>
+  <p:timing>
+    <p:tnLst>
+      <p:par>
+        <p:cTn id="1" dur="indefinite" restart="never" nodeType="tmRoot"/>
+      </p:par>
+    </p:tnLst>
+  </p:timing>
 </p:sld>
 </file>
 
